--- a/Lectures/Chto_vozmozhno_vychislit_v2.pptx
+++ b/Lectures/Chto_vozmozhno_vychislit_v2.pptx
@@ -287,7 +287,7 @@
           <a:p>
             <a:fld id="{F897DA55-CCC0-4531-97DC-1ED9FEF42B5C}" type="datetimeFigureOut">
               <a:rPr lang="ru-RU" smtClean="0"/>
-              <a:t>01.10.2025</a:t>
+              <a:t>01.10.2026</a:t>
             </a:fld>
             <a:endParaRPr lang="ru-RU"/>
           </a:p>
@@ -767,7 +767,7 @@
           <a:p>
             <a:fld id="{7E9354D1-4C29-44A5-9AD5-034FC5F2DC99}" type="datetime1">
               <a:rPr lang="ru-RU" smtClean="0"/>
-              <a:t>01.10.2025</a:t>
+              <a:t>01.10.2026</a:t>
             </a:fld>
             <a:endParaRPr lang="ru-RU"/>
           </a:p>
@@ -935,7 +935,7 @@
           <a:p>
             <a:fld id="{91E59219-1F7D-424C-B07A-7BB90B3E97D8}" type="datetime1">
               <a:rPr lang="ru-RU" smtClean="0"/>
-              <a:t>01.10.2025</a:t>
+              <a:t>01.10.2026</a:t>
             </a:fld>
             <a:endParaRPr lang="ru-RU"/>
           </a:p>
@@ -1113,7 +1113,7 @@
           <a:p>
             <a:fld id="{C83CE7D4-9ED1-4C75-9018-AB0CED679654}" type="datetime1">
               <a:rPr lang="ru-RU" smtClean="0"/>
-              <a:t>01.10.2025</a:t>
+              <a:t>01.10.2026</a:t>
             </a:fld>
             <a:endParaRPr lang="ru-RU"/>
           </a:p>
@@ -1281,7 +1281,7 @@
           <a:p>
             <a:fld id="{1C15AA2B-E57E-4D50-B918-65233C78F729}" type="datetime1">
               <a:rPr lang="ru-RU" smtClean="0"/>
-              <a:t>01.10.2025</a:t>
+              <a:t>01.10.2026</a:t>
             </a:fld>
             <a:endParaRPr lang="ru-RU"/>
           </a:p>
@@ -1526,7 +1526,7 @@
           <a:p>
             <a:fld id="{6F749CB8-6822-4354-BA8C-18D9F25C0AC8}" type="datetime1">
               <a:rPr lang="ru-RU" smtClean="0"/>
-              <a:t>01.10.2025</a:t>
+              <a:t>01.10.2026</a:t>
             </a:fld>
             <a:endParaRPr lang="ru-RU"/>
           </a:p>
@@ -1755,7 +1755,7 @@
           <a:p>
             <a:fld id="{F5158C36-246E-4940-96CC-B892F280BB25}" type="datetime1">
               <a:rPr lang="ru-RU" smtClean="0"/>
-              <a:t>01.10.2025</a:t>
+              <a:t>01.10.2026</a:t>
             </a:fld>
             <a:endParaRPr lang="ru-RU"/>
           </a:p>
@@ -2119,7 +2119,7 @@
           <a:p>
             <a:fld id="{6B7AA657-AA4B-4174-B365-3EC3797441EC}" type="datetime1">
               <a:rPr lang="ru-RU" smtClean="0"/>
-              <a:t>01.10.2025</a:t>
+              <a:t>01.10.2026</a:t>
             </a:fld>
             <a:endParaRPr lang="ru-RU"/>
           </a:p>
@@ -2236,7 +2236,7 @@
           <a:p>
             <a:fld id="{0E5076F5-2981-46A4-91FF-DA6F7414414A}" type="datetime1">
               <a:rPr lang="ru-RU" smtClean="0"/>
-              <a:t>01.10.2025</a:t>
+              <a:t>01.10.2026</a:t>
             </a:fld>
             <a:endParaRPr lang="ru-RU"/>
           </a:p>
@@ -2331,7 +2331,7 @@
           <a:p>
             <a:fld id="{8775B738-9B54-44CB-B2CF-FF9687D24A73}" type="datetime1">
               <a:rPr lang="ru-RU" smtClean="0"/>
-              <a:t>01.10.2025</a:t>
+              <a:t>01.10.2026</a:t>
             </a:fld>
             <a:endParaRPr lang="ru-RU"/>
           </a:p>
@@ -2606,7 +2606,7 @@
           <a:p>
             <a:fld id="{9EA2639C-03DD-4D60-88AF-4FD99815901B}" type="datetime1">
               <a:rPr lang="ru-RU" smtClean="0"/>
-              <a:t>01.10.2025</a:t>
+              <a:t>01.10.2026</a:t>
             </a:fld>
             <a:endParaRPr lang="ru-RU"/>
           </a:p>
@@ -2858,7 +2858,7 @@
           <a:p>
             <a:fld id="{3089592D-1CE8-47D3-9981-D4F365AA57AC}" type="datetime1">
               <a:rPr lang="ru-RU" smtClean="0"/>
-              <a:t>01.10.2025</a:t>
+              <a:t>01.10.2026</a:t>
             </a:fld>
             <a:endParaRPr lang="ru-RU"/>
           </a:p>
@@ -3069,7 +3069,7 @@
           <a:p>
             <a:fld id="{5E5B2BAE-F061-4EE3-B069-F7EBFA0A5EE8}" type="datetime1">
               <a:rPr lang="ru-RU" smtClean="0"/>
-              <a:t>01.10.2025</a:t>
+              <a:t>01.10.2026</a:t>
             </a:fld>
             <a:endParaRPr lang="ru-RU"/>
           </a:p>
@@ -4332,8 +4332,8 @@
           </a:p>
         </p:txBody>
       </p:sp>
-      <mc:AlternateContent xmlns:mc="http://schemas.openxmlformats.org/markup-compatibility/2006" xmlns:a14="http://schemas.microsoft.com/office/drawing/2010/main">
-        <mc:Choice Requires="a14">
+      <mc:AlternateContent xmlns:mc="http://schemas.openxmlformats.org/markup-compatibility/2006">
+        <mc:Choice xmlns:a14="http://schemas.microsoft.com/office/drawing/2010/main" Requires="a14">
           <p:sp>
             <p:nvSpPr>
               <p:cNvPr id="3" name="Объект 2"/>
@@ -4730,7 +4730,7 @@
                 </a:r>
                 <a:r>
                   <a:rPr lang="ru-RU" dirty="0"/>
-                  <a:t>вузов - </a:t>
+                  <a:t>вузов – </a:t>
                 </a:r>
                 <a14:m>
                   <m:oMath xmlns:m="http://schemas.openxmlformats.org/officeDocument/2006/math">
@@ -4772,7 +4772,7 @@
             </p:txBody>
           </p:sp>
         </mc:Choice>
-        <mc:Fallback xmlns="">
+        <mc:Fallback>
           <p:sp>
             <p:nvSpPr>
               <p:cNvPr id="3" name="Объект 2"/>
@@ -4788,7 +4788,7 @@
                 <a:off x="838200" y="1825624"/>
                 <a:ext cx="10515600" cy="4665327"/>
               </a:xfrm>
-              <a:blipFill rotWithShape="0">
+              <a:blipFill>
                 <a:blip r:embed="rId2"/>
                 <a:stretch>
                   <a:fillRect l="-1043" t="-1958" r="-986"/>
@@ -5145,8 +5145,8 @@
           </a:p>
         </p:txBody>
       </p:sp>
-      <mc:AlternateContent xmlns:mc="http://schemas.openxmlformats.org/markup-compatibility/2006" xmlns:a14="http://schemas.microsoft.com/office/drawing/2010/main">
-        <mc:Choice Requires="a14">
+      <mc:AlternateContent xmlns:mc="http://schemas.openxmlformats.org/markup-compatibility/2006">
+        <mc:Choice xmlns:a14="http://schemas.microsoft.com/office/drawing/2010/main" Requires="a14">
           <p:sp>
             <p:nvSpPr>
               <p:cNvPr id="3" name="Объект 2"/>
@@ -5295,7 +5295,7 @@
                 </a:r>
                 <a:r>
                   <a:rPr lang="ru-RU" dirty="0"/>
-                  <a:t>- полином</a:t>
+                  <a:t>– полином</a:t>
                 </a:r>
               </a:p>
               <a:p>
@@ -5326,7 +5326,7 @@
             </p:txBody>
           </p:sp>
         </mc:Choice>
-        <mc:Fallback xmlns="">
+        <mc:Fallback>
           <p:sp>
             <p:nvSpPr>
               <p:cNvPr id="3" name="Объект 2"/>
@@ -5437,8 +5437,8 @@
           </a:p>
         </p:txBody>
       </p:sp>
-      <mc:AlternateContent xmlns:mc="http://schemas.openxmlformats.org/markup-compatibility/2006" xmlns:a14="http://schemas.microsoft.com/office/drawing/2010/main">
-        <mc:Choice Requires="a14">
+      <mc:AlternateContent xmlns:mc="http://schemas.openxmlformats.org/markup-compatibility/2006">
+        <mc:Choice xmlns:a14="http://schemas.microsoft.com/office/drawing/2010/main" Requires="a14">
           <p:sp>
             <p:nvSpPr>
               <p:cNvPr id="3" name="Объект 2"/>
@@ -5498,7 +5498,7 @@
                 </a14:m>
                 <a:r>
                   <a:rPr lang="ru-RU" dirty="0"/>
-                  <a:t> Из «здравого смысла» следует, что при увеличении роста сложности, студенту необходимо не только искать больше студентов – групп - факультетов – вузов, но и уходить с каждым разом в более укрупнённые объекты.</a:t>
+                  <a:t> Из «здравого смысла» следует, что при увеличении роста сложности, студенту необходимо не только искать больше студентов – групп – факультетов – вузов, но и уходить с каждым разом в более укрупнённые объекты.</a:t>
                 </a:r>
                 <a:endParaRPr lang="en-US" dirty="0"/>
               </a:p>
@@ -5526,7 +5526,7 @@
             </p:txBody>
           </p:sp>
         </mc:Choice>
-        <mc:Fallback xmlns="">
+        <mc:Fallback>
           <p:sp>
             <p:nvSpPr>
               <p:cNvPr id="3" name="Объект 2"/>
@@ -5538,7 +5538,7 @@
               </p:nvPr>
             </p:nvSpPr>
             <p:spPr>
-              <a:blipFill rotWithShape="0">
+              <a:blipFill>
                 <a:blip r:embed="rId2"/>
                 <a:stretch>
                   <a:fillRect l="-1217" t="-2241"/>
@@ -5665,7 +5665,7 @@
           <a:p>
             <a:r>
               <a:rPr lang="ru-RU" dirty="0"/>
-              <a:t>Экспоненциальная - недостижимая</a:t>
+              <a:t>Экспоненциальная – недостижимая</a:t>
             </a:r>
           </a:p>
           <a:p>
@@ -7416,7 +7416,7 @@
             </a:pPr>
             <a:r>
               <a:rPr lang="ru-RU" dirty="0"/>
-              <a:t>Предположение 4 - </a:t>
+              <a:t>Предположение 4</a:t>
             </a:r>
           </a:p>
           <a:p>
@@ -7466,7 +7466,7 @@
               <a:t>Достаточные</a:t>
             </a:r>
             <a:r>
-              <a:rPr lang="en-US"/>
+              <a:rPr lang="en-US" dirty="0"/>
               <a:t>:</a:t>
             </a:r>
             <a:endParaRPr lang="ru-RU" dirty="0"/>
